--- a/word-drafts/figures/SchemaRegistry-FigNotation.pptx
+++ b/word-drafts/figures/SchemaRegistry-FigNotation.pptx
@@ -3494,7 +3494,7 @@
         <p:spPr>
           <a:xfrm>
             <a:off x="4595812" y="1228725"/>
-            <a:ext cx="428625" cy="123825"/>
+            <a:ext cx="533400" cy="123825"/>
           </a:xfrm>
           <a:prstGeom prst="rect">
             <a:avLst/>
